--- a/master_template.pptx
+++ b/master_template.pptx
@@ -5,7 +5,7 @@
     <p:sldMasterId id="2147483658" r:id="rId1"/>
   </p:sldMasterIdLst>
   <p:notesMasterIdLst>
-    <p:notesMasterId r:id="rId15"/>
+    <p:notesMasterId r:id="rId19"/>
   </p:notesMasterIdLst>
   <p:sldIdLst>
     <p:sldId id="256" r:id="rId2"/>
@@ -13,14 +13,18 @@
     <p:sldId id="258" r:id="rId4"/>
     <p:sldId id="268" r:id="rId5"/>
     <p:sldId id="260" r:id="rId6"/>
-    <p:sldId id="261" r:id="rId7"/>
-    <p:sldId id="269" r:id="rId8"/>
-    <p:sldId id="270" r:id="rId9"/>
-    <p:sldId id="263" r:id="rId10"/>
-    <p:sldId id="264" r:id="rId11"/>
-    <p:sldId id="265" r:id="rId12"/>
-    <p:sldId id="266" r:id="rId13"/>
-    <p:sldId id="267" r:id="rId14"/>
+    <p:sldId id="271" r:id="rId7"/>
+    <p:sldId id="261" r:id="rId8"/>
+    <p:sldId id="269" r:id="rId9"/>
+    <p:sldId id="270" r:id="rId10"/>
+    <p:sldId id="263" r:id="rId11"/>
+    <p:sldId id="264" r:id="rId12"/>
+    <p:sldId id="272" r:id="rId13"/>
+    <p:sldId id="273" r:id="rId14"/>
+    <p:sldId id="274" r:id="rId15"/>
+    <p:sldId id="265" r:id="rId16"/>
+    <p:sldId id="266" r:id="rId17"/>
+    <p:sldId id="267" r:id="rId18"/>
   </p:sldIdLst>
   <p:sldSz cx="9144000" cy="5143500" type="screen16x9"/>
   <p:notesSz cx="6858000" cy="9144000"/>
@@ -994,6 +998,128 @@
   <p:cSld>
     <p:spTree>
       <p:nvGrpSpPr>
+        <p:cNvPr id="1" name="Shape 93"/>
+        <p:cNvGrpSpPr/>
+        <p:nvPr/>
+      </p:nvGrpSpPr>
+      <p:grpSpPr>
+        <a:xfrm>
+          <a:off x="0" y="0"/>
+          <a:ext cx="0" cy="0"/>
+          <a:chOff x="0" y="0"/>
+          <a:chExt cx="0" cy="0"/>
+        </a:xfrm>
+      </p:grpSpPr>
+      <p:sp>
+        <p:nvSpPr>
+          <p:cNvPr id="94" name="Google Shape;94;p8:notes"/>
+          <p:cNvSpPr>
+            <a:spLocks noGrp="1" noRot="1" noChangeAspect="1"/>
+          </p:cNvSpPr>
+          <p:nvPr>
+            <p:ph type="sldImg" idx="2"/>
+          </p:nvPr>
+        </p:nvSpPr>
+        <p:spPr>
+          <a:xfrm>
+            <a:off x="381000" y="685800"/>
+            <a:ext cx="6096000" cy="3429000"/>
+          </a:xfrm>
+          <a:custGeom>
+            <a:avLst/>
+            <a:gdLst/>
+            <a:ahLst/>
+            <a:cxnLst/>
+            <a:rect l="l" t="t" r="r" b="b"/>
+            <a:pathLst>
+              <a:path w="120000" h="120000" extrusionOk="0">
+                <a:moveTo>
+                  <a:pt x="0" y="0"/>
+                </a:moveTo>
+                <a:lnTo>
+                  <a:pt x="120000" y="0"/>
+                </a:lnTo>
+                <a:lnTo>
+                  <a:pt x="120000" y="120000"/>
+                </a:lnTo>
+                <a:lnTo>
+                  <a:pt x="0" y="120000"/>
+                </a:lnTo>
+                <a:close/>
+              </a:path>
+            </a:pathLst>
+          </a:custGeom>
+          <a:noFill/>
+          <a:ln w="9525" cap="flat" cmpd="sng">
+            <a:solidFill>
+              <a:srgbClr val="000000"/>
+            </a:solidFill>
+            <a:prstDash val="solid"/>
+            <a:round/>
+            <a:headEnd type="none" w="sm" len="sm"/>
+            <a:tailEnd type="none" w="sm" len="sm"/>
+          </a:ln>
+        </p:spPr>
+      </p:sp>
+      <p:sp>
+        <p:nvSpPr>
+          <p:cNvPr id="95" name="Google Shape;95;p8:notes"/>
+          <p:cNvSpPr txBox="1">
+            <a:spLocks noGrp="1"/>
+          </p:cNvSpPr>
+          <p:nvPr>
+            <p:ph type="body" idx="1"/>
+          </p:nvPr>
+        </p:nvSpPr>
+        <p:spPr>
+          <a:xfrm>
+            <a:off x="685800" y="4343400"/>
+            <a:ext cx="5486400" cy="4114800"/>
+          </a:xfrm>
+          <a:prstGeom prst="rect">
+            <a:avLst/>
+          </a:prstGeom>
+          <a:noFill/>
+          <a:ln>
+            <a:noFill/>
+          </a:ln>
+        </p:spPr>
+        <p:txBody>
+          <a:bodyPr spcFirstLastPara="1" wrap="square" lIns="91425" tIns="91425" rIns="91425" bIns="91425" anchor="t" anchorCtr="0">
+            <a:noAutofit/>
+          </a:bodyPr>
+          <a:lstStyle/>
+          <a:p>
+            <a:pPr marL="0" lvl="0" indent="0" algn="l" rtl="0">
+              <a:lnSpc>
+                <a:spcPct val="100000"/>
+              </a:lnSpc>
+              <a:spcBef>
+                <a:spcPts val="0"/>
+              </a:spcBef>
+              <a:spcAft>
+                <a:spcPts val="0"/>
+              </a:spcAft>
+              <a:buSzPts val="1100"/>
+              <a:buNone/>
+            </a:pPr>
+            <a:endParaRPr/>
+          </a:p>
+        </p:txBody>
+      </p:sp>
+    </p:spTree>
+  </p:cSld>
+  <p:clrMapOvr>
+    <a:masterClrMapping/>
+  </p:clrMapOvr>
+</p:notes>
+</file>
+
+<file path=ppt/notesSlides/notesSlide11.xml><?xml version="1.0" encoding="utf-8"?>
+<p:notes xmlns:a="http://schemas.openxmlformats.org/drawingml/2006/main" xmlns:r="http://schemas.openxmlformats.org/officeDocument/2006/relationships" xmlns:p="http://schemas.openxmlformats.org/presentationml/2006/main" showMasterSp="0" showMasterPhAnim="0">
+  <p:cSld>
+    <p:spTree>
+      <p:nvGrpSpPr>
         <p:cNvPr id="1" name="Shape 99"/>
         <p:cNvGrpSpPr/>
         <p:nvPr/>
@@ -1111,7 +1237,442 @@
 </p:notes>
 </file>
 
-<file path=ppt/notesSlides/notesSlide11.xml><?xml version="1.0" encoding="utf-8"?>
+<file path=ppt/notesSlides/notesSlide12.xml><?xml version="1.0" encoding="utf-8"?>
+<p:notes xmlns:a="http://schemas.openxmlformats.org/drawingml/2006/main" xmlns:r="http://schemas.openxmlformats.org/officeDocument/2006/relationships" xmlns:p="http://schemas.openxmlformats.org/presentationml/2006/main" showMasterSp="0" showMasterPhAnim="0">
+  <p:cSld>
+    <p:spTree>
+      <p:nvGrpSpPr>
+        <p:cNvPr id="1" name="Shape 99">
+          <a:extLst>
+            <a:ext uri="{FF2B5EF4-FFF2-40B4-BE49-F238E27FC236}">
+              <a16:creationId xmlns:a16="http://schemas.microsoft.com/office/drawing/2014/main" id="{EC5C04F7-285D-1905-4641-AED1507DF842}"/>
+            </a:ext>
+          </a:extLst>
+        </p:cNvPr>
+        <p:cNvGrpSpPr/>
+        <p:nvPr/>
+      </p:nvGrpSpPr>
+      <p:grpSpPr>
+        <a:xfrm>
+          <a:off x="0" y="0"/>
+          <a:ext cx="0" cy="0"/>
+          <a:chOff x="0" y="0"/>
+          <a:chExt cx="0" cy="0"/>
+        </a:xfrm>
+      </p:grpSpPr>
+      <p:sp>
+        <p:nvSpPr>
+          <p:cNvPr id="100" name="Google Shape;100;p9:notes">
+            <a:extLst>
+              <a:ext uri="{FF2B5EF4-FFF2-40B4-BE49-F238E27FC236}">
+                <a16:creationId xmlns:a16="http://schemas.microsoft.com/office/drawing/2014/main" id="{C84532B9-5354-AD39-BE94-A3E136BD31BC}"/>
+              </a:ext>
+            </a:extLst>
+          </p:cNvPr>
+          <p:cNvSpPr>
+            <a:spLocks noGrp="1" noRot="1" noChangeAspect="1"/>
+          </p:cNvSpPr>
+          <p:nvPr>
+            <p:ph type="sldImg" idx="2"/>
+          </p:nvPr>
+        </p:nvSpPr>
+        <p:spPr>
+          <a:xfrm>
+            <a:off x="381000" y="685800"/>
+            <a:ext cx="6096000" cy="3429000"/>
+          </a:xfrm>
+          <a:custGeom>
+            <a:avLst/>
+            <a:gdLst/>
+            <a:ahLst/>
+            <a:cxnLst/>
+            <a:rect l="l" t="t" r="r" b="b"/>
+            <a:pathLst>
+              <a:path w="120000" h="120000" extrusionOk="0">
+                <a:moveTo>
+                  <a:pt x="0" y="0"/>
+                </a:moveTo>
+                <a:lnTo>
+                  <a:pt x="120000" y="0"/>
+                </a:lnTo>
+                <a:lnTo>
+                  <a:pt x="120000" y="120000"/>
+                </a:lnTo>
+                <a:lnTo>
+                  <a:pt x="0" y="120000"/>
+                </a:lnTo>
+                <a:close/>
+              </a:path>
+            </a:pathLst>
+          </a:custGeom>
+          <a:noFill/>
+          <a:ln w="9525" cap="flat" cmpd="sng">
+            <a:solidFill>
+              <a:srgbClr val="000000"/>
+            </a:solidFill>
+            <a:prstDash val="solid"/>
+            <a:round/>
+            <a:headEnd type="none" w="sm" len="sm"/>
+            <a:tailEnd type="none" w="sm" len="sm"/>
+          </a:ln>
+        </p:spPr>
+      </p:sp>
+      <p:sp>
+        <p:nvSpPr>
+          <p:cNvPr id="101" name="Google Shape;101;p9:notes">
+            <a:extLst>
+              <a:ext uri="{FF2B5EF4-FFF2-40B4-BE49-F238E27FC236}">
+                <a16:creationId xmlns:a16="http://schemas.microsoft.com/office/drawing/2014/main" id="{831D5190-93B4-B39E-58E4-5E7AF20799A9}"/>
+              </a:ext>
+            </a:extLst>
+          </p:cNvPr>
+          <p:cNvSpPr txBox="1">
+            <a:spLocks noGrp="1"/>
+          </p:cNvSpPr>
+          <p:nvPr>
+            <p:ph type="body" idx="1"/>
+          </p:nvPr>
+        </p:nvSpPr>
+        <p:spPr>
+          <a:xfrm>
+            <a:off x="685800" y="4343400"/>
+            <a:ext cx="5486400" cy="4114800"/>
+          </a:xfrm>
+          <a:prstGeom prst="rect">
+            <a:avLst/>
+          </a:prstGeom>
+          <a:noFill/>
+          <a:ln>
+            <a:noFill/>
+          </a:ln>
+        </p:spPr>
+        <p:txBody>
+          <a:bodyPr spcFirstLastPara="1" wrap="square" lIns="91425" tIns="91425" rIns="91425" bIns="91425" anchor="t" anchorCtr="0">
+            <a:noAutofit/>
+          </a:bodyPr>
+          <a:lstStyle/>
+          <a:p>
+            <a:pPr marL="0" lvl="0" indent="0" algn="l" rtl="0">
+              <a:lnSpc>
+                <a:spcPct val="100000"/>
+              </a:lnSpc>
+              <a:spcBef>
+                <a:spcPts val="0"/>
+              </a:spcBef>
+              <a:spcAft>
+                <a:spcPts val="0"/>
+              </a:spcAft>
+              <a:buSzPts val="1100"/>
+              <a:buNone/>
+            </a:pPr>
+            <a:endParaRPr/>
+          </a:p>
+        </p:txBody>
+      </p:sp>
+    </p:spTree>
+    <p:extLst>
+      <p:ext uri="{BB962C8B-B14F-4D97-AF65-F5344CB8AC3E}">
+        <p14:creationId xmlns:p14="http://schemas.microsoft.com/office/powerpoint/2010/main" val="2508399688"/>
+      </p:ext>
+    </p:extLst>
+  </p:cSld>
+  <p:clrMapOvr>
+    <a:masterClrMapping/>
+  </p:clrMapOvr>
+</p:notes>
+</file>
+
+<file path=ppt/notesSlides/notesSlide13.xml><?xml version="1.0" encoding="utf-8"?>
+<p:notes xmlns:a="http://schemas.openxmlformats.org/drawingml/2006/main" xmlns:r="http://schemas.openxmlformats.org/officeDocument/2006/relationships" xmlns:p="http://schemas.openxmlformats.org/presentationml/2006/main" showMasterSp="0" showMasterPhAnim="0">
+  <p:cSld>
+    <p:spTree>
+      <p:nvGrpSpPr>
+        <p:cNvPr id="1" name="Shape 99">
+          <a:extLst>
+            <a:ext uri="{FF2B5EF4-FFF2-40B4-BE49-F238E27FC236}">
+              <a16:creationId xmlns:a16="http://schemas.microsoft.com/office/drawing/2014/main" id="{F9B47D2A-FDD3-30EE-6905-4962D8BB3C0C}"/>
+            </a:ext>
+          </a:extLst>
+        </p:cNvPr>
+        <p:cNvGrpSpPr/>
+        <p:nvPr/>
+      </p:nvGrpSpPr>
+      <p:grpSpPr>
+        <a:xfrm>
+          <a:off x="0" y="0"/>
+          <a:ext cx="0" cy="0"/>
+          <a:chOff x="0" y="0"/>
+          <a:chExt cx="0" cy="0"/>
+        </a:xfrm>
+      </p:grpSpPr>
+      <p:sp>
+        <p:nvSpPr>
+          <p:cNvPr id="100" name="Google Shape;100;p9:notes">
+            <a:extLst>
+              <a:ext uri="{FF2B5EF4-FFF2-40B4-BE49-F238E27FC236}">
+                <a16:creationId xmlns:a16="http://schemas.microsoft.com/office/drawing/2014/main" id="{41BD7A83-9238-754E-C130-64AFA00BF989}"/>
+              </a:ext>
+            </a:extLst>
+          </p:cNvPr>
+          <p:cNvSpPr>
+            <a:spLocks noGrp="1" noRot="1" noChangeAspect="1"/>
+          </p:cNvSpPr>
+          <p:nvPr>
+            <p:ph type="sldImg" idx="2"/>
+          </p:nvPr>
+        </p:nvSpPr>
+        <p:spPr>
+          <a:xfrm>
+            <a:off x="381000" y="685800"/>
+            <a:ext cx="6096000" cy="3429000"/>
+          </a:xfrm>
+          <a:custGeom>
+            <a:avLst/>
+            <a:gdLst/>
+            <a:ahLst/>
+            <a:cxnLst/>
+            <a:rect l="l" t="t" r="r" b="b"/>
+            <a:pathLst>
+              <a:path w="120000" h="120000" extrusionOk="0">
+                <a:moveTo>
+                  <a:pt x="0" y="0"/>
+                </a:moveTo>
+                <a:lnTo>
+                  <a:pt x="120000" y="0"/>
+                </a:lnTo>
+                <a:lnTo>
+                  <a:pt x="120000" y="120000"/>
+                </a:lnTo>
+                <a:lnTo>
+                  <a:pt x="0" y="120000"/>
+                </a:lnTo>
+                <a:close/>
+              </a:path>
+            </a:pathLst>
+          </a:custGeom>
+          <a:noFill/>
+          <a:ln w="9525" cap="flat" cmpd="sng">
+            <a:solidFill>
+              <a:srgbClr val="000000"/>
+            </a:solidFill>
+            <a:prstDash val="solid"/>
+            <a:round/>
+            <a:headEnd type="none" w="sm" len="sm"/>
+            <a:tailEnd type="none" w="sm" len="sm"/>
+          </a:ln>
+        </p:spPr>
+      </p:sp>
+      <p:sp>
+        <p:nvSpPr>
+          <p:cNvPr id="101" name="Google Shape;101;p9:notes">
+            <a:extLst>
+              <a:ext uri="{FF2B5EF4-FFF2-40B4-BE49-F238E27FC236}">
+                <a16:creationId xmlns:a16="http://schemas.microsoft.com/office/drawing/2014/main" id="{0B2969F7-0042-5DAB-01B6-85146DCBA541}"/>
+              </a:ext>
+            </a:extLst>
+          </p:cNvPr>
+          <p:cNvSpPr txBox="1">
+            <a:spLocks noGrp="1"/>
+          </p:cNvSpPr>
+          <p:nvPr>
+            <p:ph type="body" idx="1"/>
+          </p:nvPr>
+        </p:nvSpPr>
+        <p:spPr>
+          <a:xfrm>
+            <a:off x="685800" y="4343400"/>
+            <a:ext cx="5486400" cy="4114800"/>
+          </a:xfrm>
+          <a:prstGeom prst="rect">
+            <a:avLst/>
+          </a:prstGeom>
+          <a:noFill/>
+          <a:ln>
+            <a:noFill/>
+          </a:ln>
+        </p:spPr>
+        <p:txBody>
+          <a:bodyPr spcFirstLastPara="1" wrap="square" lIns="91425" tIns="91425" rIns="91425" bIns="91425" anchor="t" anchorCtr="0">
+            <a:noAutofit/>
+          </a:bodyPr>
+          <a:lstStyle/>
+          <a:p>
+            <a:pPr marL="0" lvl="0" indent="0" algn="l" rtl="0">
+              <a:lnSpc>
+                <a:spcPct val="100000"/>
+              </a:lnSpc>
+              <a:spcBef>
+                <a:spcPts val="0"/>
+              </a:spcBef>
+              <a:spcAft>
+                <a:spcPts val="0"/>
+              </a:spcAft>
+              <a:buSzPts val="1100"/>
+              <a:buNone/>
+            </a:pPr>
+            <a:endParaRPr/>
+          </a:p>
+        </p:txBody>
+      </p:sp>
+    </p:spTree>
+    <p:extLst>
+      <p:ext uri="{BB962C8B-B14F-4D97-AF65-F5344CB8AC3E}">
+        <p14:creationId xmlns:p14="http://schemas.microsoft.com/office/powerpoint/2010/main" val="1279719021"/>
+      </p:ext>
+    </p:extLst>
+  </p:cSld>
+  <p:clrMapOvr>
+    <a:masterClrMapping/>
+  </p:clrMapOvr>
+</p:notes>
+</file>
+
+<file path=ppt/notesSlides/notesSlide14.xml><?xml version="1.0" encoding="utf-8"?>
+<p:notes xmlns:a="http://schemas.openxmlformats.org/drawingml/2006/main" xmlns:r="http://schemas.openxmlformats.org/officeDocument/2006/relationships" xmlns:p="http://schemas.openxmlformats.org/presentationml/2006/main" showMasterSp="0" showMasterPhAnim="0">
+  <p:cSld>
+    <p:spTree>
+      <p:nvGrpSpPr>
+        <p:cNvPr id="1" name="Shape 99">
+          <a:extLst>
+            <a:ext uri="{FF2B5EF4-FFF2-40B4-BE49-F238E27FC236}">
+              <a16:creationId xmlns:a16="http://schemas.microsoft.com/office/drawing/2014/main" id="{0E669119-40B4-850C-FB37-BBC9A713603E}"/>
+            </a:ext>
+          </a:extLst>
+        </p:cNvPr>
+        <p:cNvGrpSpPr/>
+        <p:nvPr/>
+      </p:nvGrpSpPr>
+      <p:grpSpPr>
+        <a:xfrm>
+          <a:off x="0" y="0"/>
+          <a:ext cx="0" cy="0"/>
+          <a:chOff x="0" y="0"/>
+          <a:chExt cx="0" cy="0"/>
+        </a:xfrm>
+      </p:grpSpPr>
+      <p:sp>
+        <p:nvSpPr>
+          <p:cNvPr id="100" name="Google Shape;100;p9:notes">
+            <a:extLst>
+              <a:ext uri="{FF2B5EF4-FFF2-40B4-BE49-F238E27FC236}">
+                <a16:creationId xmlns:a16="http://schemas.microsoft.com/office/drawing/2014/main" id="{C839AC58-7C7B-2E75-4633-5B6EBC4014C5}"/>
+              </a:ext>
+            </a:extLst>
+          </p:cNvPr>
+          <p:cNvSpPr>
+            <a:spLocks noGrp="1" noRot="1" noChangeAspect="1"/>
+          </p:cNvSpPr>
+          <p:nvPr>
+            <p:ph type="sldImg" idx="2"/>
+          </p:nvPr>
+        </p:nvSpPr>
+        <p:spPr>
+          <a:xfrm>
+            <a:off x="381000" y="685800"/>
+            <a:ext cx="6096000" cy="3429000"/>
+          </a:xfrm>
+          <a:custGeom>
+            <a:avLst/>
+            <a:gdLst/>
+            <a:ahLst/>
+            <a:cxnLst/>
+            <a:rect l="l" t="t" r="r" b="b"/>
+            <a:pathLst>
+              <a:path w="120000" h="120000" extrusionOk="0">
+                <a:moveTo>
+                  <a:pt x="0" y="0"/>
+                </a:moveTo>
+                <a:lnTo>
+                  <a:pt x="120000" y="0"/>
+                </a:lnTo>
+                <a:lnTo>
+                  <a:pt x="120000" y="120000"/>
+                </a:lnTo>
+                <a:lnTo>
+                  <a:pt x="0" y="120000"/>
+                </a:lnTo>
+                <a:close/>
+              </a:path>
+            </a:pathLst>
+          </a:custGeom>
+          <a:noFill/>
+          <a:ln w="9525" cap="flat" cmpd="sng">
+            <a:solidFill>
+              <a:srgbClr val="000000"/>
+            </a:solidFill>
+            <a:prstDash val="solid"/>
+            <a:round/>
+            <a:headEnd type="none" w="sm" len="sm"/>
+            <a:tailEnd type="none" w="sm" len="sm"/>
+          </a:ln>
+        </p:spPr>
+      </p:sp>
+      <p:sp>
+        <p:nvSpPr>
+          <p:cNvPr id="101" name="Google Shape;101;p9:notes">
+            <a:extLst>
+              <a:ext uri="{FF2B5EF4-FFF2-40B4-BE49-F238E27FC236}">
+                <a16:creationId xmlns:a16="http://schemas.microsoft.com/office/drawing/2014/main" id="{45157453-6EA1-A539-0E52-3281F0F0C1DC}"/>
+              </a:ext>
+            </a:extLst>
+          </p:cNvPr>
+          <p:cNvSpPr txBox="1">
+            <a:spLocks noGrp="1"/>
+          </p:cNvSpPr>
+          <p:nvPr>
+            <p:ph type="body" idx="1"/>
+          </p:nvPr>
+        </p:nvSpPr>
+        <p:spPr>
+          <a:xfrm>
+            <a:off x="685800" y="4343400"/>
+            <a:ext cx="5486400" cy="4114800"/>
+          </a:xfrm>
+          <a:prstGeom prst="rect">
+            <a:avLst/>
+          </a:prstGeom>
+          <a:noFill/>
+          <a:ln>
+            <a:noFill/>
+          </a:ln>
+        </p:spPr>
+        <p:txBody>
+          <a:bodyPr spcFirstLastPara="1" wrap="square" lIns="91425" tIns="91425" rIns="91425" bIns="91425" anchor="t" anchorCtr="0">
+            <a:noAutofit/>
+          </a:bodyPr>
+          <a:lstStyle/>
+          <a:p>
+            <a:pPr marL="0" lvl="0" indent="0" algn="l" rtl="0">
+              <a:lnSpc>
+                <a:spcPct val="100000"/>
+              </a:lnSpc>
+              <a:spcBef>
+                <a:spcPts val="0"/>
+              </a:spcBef>
+              <a:spcAft>
+                <a:spcPts val="0"/>
+              </a:spcAft>
+              <a:buSzPts val="1100"/>
+              <a:buNone/>
+            </a:pPr>
+            <a:endParaRPr/>
+          </a:p>
+        </p:txBody>
+      </p:sp>
+    </p:spTree>
+    <p:extLst>
+      <p:ext uri="{BB962C8B-B14F-4D97-AF65-F5344CB8AC3E}">
+        <p14:creationId xmlns:p14="http://schemas.microsoft.com/office/powerpoint/2010/main" val="3622640528"/>
+      </p:ext>
+    </p:extLst>
+  </p:cSld>
+  <p:clrMapOvr>
+    <a:masterClrMapping/>
+  </p:clrMapOvr>
+</p:notes>
+</file>
+
+<file path=ppt/notesSlides/notesSlide15.xml><?xml version="1.0" encoding="utf-8"?>
 <p:notes xmlns:a="http://schemas.openxmlformats.org/drawingml/2006/main" xmlns:r="http://schemas.openxmlformats.org/officeDocument/2006/relationships" xmlns:p="http://schemas.openxmlformats.org/presentationml/2006/main" showMasterSp="0" showMasterPhAnim="0">
   <p:cSld>
     <p:spTree>
@@ -1233,7 +1794,7 @@
 </p:notes>
 </file>
 
-<file path=ppt/notesSlides/notesSlide12.xml><?xml version="1.0" encoding="utf-8"?>
+<file path=ppt/notesSlides/notesSlide16.xml><?xml version="1.0" encoding="utf-8"?>
 <p:notes xmlns:a="http://schemas.openxmlformats.org/drawingml/2006/main" xmlns:r="http://schemas.openxmlformats.org/officeDocument/2006/relationships" xmlns:p="http://schemas.openxmlformats.org/presentationml/2006/main" showMasterSp="0" showMasterPhAnim="0">
   <p:cSld>
     <p:spTree>
@@ -1355,7 +1916,7 @@
 </p:notes>
 </file>
 
-<file path=ppt/notesSlides/notesSlide13.xml><?xml version="1.0" encoding="utf-8"?>
+<file path=ppt/notesSlides/notesSlide17.xml><?xml version="1.0" encoding="utf-8"?>
 <p:notes xmlns:a="http://schemas.openxmlformats.org/drawingml/2006/main" xmlns:r="http://schemas.openxmlformats.org/officeDocument/2006/relationships" xmlns:p="http://schemas.openxmlformats.org/presentationml/2006/main" showMasterSp="0" showMasterPhAnim="0">
   <p:cSld>
     <p:spTree>
@@ -1993,6 +2554,151 @@
   <p:cSld>
     <p:spTree>
       <p:nvGrpSpPr>
+        <p:cNvPr id="1" name="Shape 75">
+          <a:extLst>
+            <a:ext uri="{FF2B5EF4-FFF2-40B4-BE49-F238E27FC236}">
+              <a16:creationId xmlns:a16="http://schemas.microsoft.com/office/drawing/2014/main" id="{9E1C7442-1DE8-5763-08F9-98FB19CB358C}"/>
+            </a:ext>
+          </a:extLst>
+        </p:cNvPr>
+        <p:cNvGrpSpPr/>
+        <p:nvPr/>
+      </p:nvGrpSpPr>
+      <p:grpSpPr>
+        <a:xfrm>
+          <a:off x="0" y="0"/>
+          <a:ext cx="0" cy="0"/>
+          <a:chOff x="0" y="0"/>
+          <a:chExt cx="0" cy="0"/>
+        </a:xfrm>
+      </p:grpSpPr>
+      <p:sp>
+        <p:nvSpPr>
+          <p:cNvPr id="76" name="Google Shape;76;p5:notes">
+            <a:extLst>
+              <a:ext uri="{FF2B5EF4-FFF2-40B4-BE49-F238E27FC236}">
+                <a16:creationId xmlns:a16="http://schemas.microsoft.com/office/drawing/2014/main" id="{A88FE6C1-ADF1-4201-8556-3C6797B6BE83}"/>
+              </a:ext>
+            </a:extLst>
+          </p:cNvPr>
+          <p:cNvSpPr>
+            <a:spLocks noGrp="1" noRot="1" noChangeAspect="1"/>
+          </p:cNvSpPr>
+          <p:nvPr>
+            <p:ph type="sldImg" idx="2"/>
+          </p:nvPr>
+        </p:nvSpPr>
+        <p:spPr>
+          <a:xfrm>
+            <a:off x="381000" y="685800"/>
+            <a:ext cx="6096000" cy="3429000"/>
+          </a:xfrm>
+          <a:custGeom>
+            <a:avLst/>
+            <a:gdLst/>
+            <a:ahLst/>
+            <a:cxnLst/>
+            <a:rect l="l" t="t" r="r" b="b"/>
+            <a:pathLst>
+              <a:path w="120000" h="120000" extrusionOk="0">
+                <a:moveTo>
+                  <a:pt x="0" y="0"/>
+                </a:moveTo>
+                <a:lnTo>
+                  <a:pt x="120000" y="0"/>
+                </a:lnTo>
+                <a:lnTo>
+                  <a:pt x="120000" y="120000"/>
+                </a:lnTo>
+                <a:lnTo>
+                  <a:pt x="0" y="120000"/>
+                </a:lnTo>
+                <a:close/>
+              </a:path>
+            </a:pathLst>
+          </a:custGeom>
+          <a:noFill/>
+          <a:ln w="9525" cap="flat" cmpd="sng">
+            <a:solidFill>
+              <a:srgbClr val="000000"/>
+            </a:solidFill>
+            <a:prstDash val="solid"/>
+            <a:round/>
+            <a:headEnd type="none" w="sm" len="sm"/>
+            <a:tailEnd type="none" w="sm" len="sm"/>
+          </a:ln>
+        </p:spPr>
+      </p:sp>
+      <p:sp>
+        <p:nvSpPr>
+          <p:cNvPr id="77" name="Google Shape;77;p5:notes">
+            <a:extLst>
+              <a:ext uri="{FF2B5EF4-FFF2-40B4-BE49-F238E27FC236}">
+                <a16:creationId xmlns:a16="http://schemas.microsoft.com/office/drawing/2014/main" id="{CD6BE8E3-59DC-CD14-974C-0C9DC478EAF3}"/>
+              </a:ext>
+            </a:extLst>
+          </p:cNvPr>
+          <p:cNvSpPr txBox="1">
+            <a:spLocks noGrp="1"/>
+          </p:cNvSpPr>
+          <p:nvPr>
+            <p:ph type="body" idx="1"/>
+          </p:nvPr>
+        </p:nvSpPr>
+        <p:spPr>
+          <a:xfrm>
+            <a:off x="685800" y="4343400"/>
+            <a:ext cx="5486400" cy="4114800"/>
+          </a:xfrm>
+          <a:prstGeom prst="rect">
+            <a:avLst/>
+          </a:prstGeom>
+          <a:noFill/>
+          <a:ln>
+            <a:noFill/>
+          </a:ln>
+        </p:spPr>
+        <p:txBody>
+          <a:bodyPr spcFirstLastPara="1" wrap="square" lIns="91425" tIns="91425" rIns="91425" bIns="91425" anchor="t" anchorCtr="0">
+            <a:noAutofit/>
+          </a:bodyPr>
+          <a:lstStyle/>
+          <a:p>
+            <a:pPr marL="0" lvl="0" indent="0" algn="l" rtl="0">
+              <a:lnSpc>
+                <a:spcPct val="100000"/>
+              </a:lnSpc>
+              <a:spcBef>
+                <a:spcPts val="0"/>
+              </a:spcBef>
+              <a:spcAft>
+                <a:spcPts val="0"/>
+              </a:spcAft>
+              <a:buSzPts val="1100"/>
+              <a:buNone/>
+            </a:pPr>
+            <a:endParaRPr/>
+          </a:p>
+        </p:txBody>
+      </p:sp>
+    </p:spTree>
+    <p:extLst>
+      <p:ext uri="{BB962C8B-B14F-4D97-AF65-F5344CB8AC3E}">
+        <p14:creationId xmlns:p14="http://schemas.microsoft.com/office/powerpoint/2010/main" val="3905869051"/>
+      </p:ext>
+    </p:extLst>
+  </p:cSld>
+  <p:clrMapOvr>
+    <a:masterClrMapping/>
+  </p:clrMapOvr>
+</p:notes>
+</file>
+
+<file path=ppt/notesSlides/notesSlide7.xml><?xml version="1.0" encoding="utf-8"?>
+<p:notes xmlns:a="http://schemas.openxmlformats.org/drawingml/2006/main" xmlns:r="http://schemas.openxmlformats.org/officeDocument/2006/relationships" xmlns:p="http://schemas.openxmlformats.org/presentationml/2006/main" showMasterSp="0" showMasterPhAnim="0">
+  <p:cSld>
+    <p:spTree>
+      <p:nvGrpSpPr>
         <p:cNvPr id="1" name="Shape 81"/>
         <p:cNvGrpSpPr/>
         <p:nvPr/>
@@ -2110,7 +2816,7 @@
 </p:notes>
 </file>
 
-<file path=ppt/notesSlides/notesSlide7.xml><?xml version="1.0" encoding="utf-8"?>
+<file path=ppt/notesSlides/notesSlide8.xml><?xml version="1.0" encoding="utf-8"?>
 <p:notes xmlns:a="http://schemas.openxmlformats.org/drawingml/2006/main" xmlns:r="http://schemas.openxmlformats.org/officeDocument/2006/relationships" xmlns:p="http://schemas.openxmlformats.org/presentationml/2006/main" showMasterSp="0" showMasterPhAnim="0">
   <p:cSld>
     <p:spTree>
@@ -2255,7 +2961,7 @@
 </p:notes>
 </file>
 
-<file path=ppt/notesSlides/notesSlide8.xml><?xml version="1.0" encoding="utf-8"?>
+<file path=ppt/notesSlides/notesSlide9.xml><?xml version="1.0" encoding="utf-8"?>
 <p:notes xmlns:a="http://schemas.openxmlformats.org/drawingml/2006/main" xmlns:r="http://schemas.openxmlformats.org/officeDocument/2006/relationships" xmlns:p="http://schemas.openxmlformats.org/presentationml/2006/main" showMasterSp="0" showMasterPhAnim="0">
   <p:cSld>
     <p:spTree>
@@ -2393,128 +3099,6 @@
         <p14:creationId xmlns:p14="http://schemas.microsoft.com/office/powerpoint/2010/main" val="129518788"/>
       </p:ext>
     </p:extLst>
-  </p:cSld>
-  <p:clrMapOvr>
-    <a:masterClrMapping/>
-  </p:clrMapOvr>
-</p:notes>
-</file>
-
-<file path=ppt/notesSlides/notesSlide9.xml><?xml version="1.0" encoding="utf-8"?>
-<p:notes xmlns:a="http://schemas.openxmlformats.org/drawingml/2006/main" xmlns:r="http://schemas.openxmlformats.org/officeDocument/2006/relationships" xmlns:p="http://schemas.openxmlformats.org/presentationml/2006/main" showMasterSp="0" showMasterPhAnim="0">
-  <p:cSld>
-    <p:spTree>
-      <p:nvGrpSpPr>
-        <p:cNvPr id="1" name="Shape 93"/>
-        <p:cNvGrpSpPr/>
-        <p:nvPr/>
-      </p:nvGrpSpPr>
-      <p:grpSpPr>
-        <a:xfrm>
-          <a:off x="0" y="0"/>
-          <a:ext cx="0" cy="0"/>
-          <a:chOff x="0" y="0"/>
-          <a:chExt cx="0" cy="0"/>
-        </a:xfrm>
-      </p:grpSpPr>
-      <p:sp>
-        <p:nvSpPr>
-          <p:cNvPr id="94" name="Google Shape;94;p8:notes"/>
-          <p:cNvSpPr>
-            <a:spLocks noGrp="1" noRot="1" noChangeAspect="1"/>
-          </p:cNvSpPr>
-          <p:nvPr>
-            <p:ph type="sldImg" idx="2"/>
-          </p:nvPr>
-        </p:nvSpPr>
-        <p:spPr>
-          <a:xfrm>
-            <a:off x="381000" y="685800"/>
-            <a:ext cx="6096000" cy="3429000"/>
-          </a:xfrm>
-          <a:custGeom>
-            <a:avLst/>
-            <a:gdLst/>
-            <a:ahLst/>
-            <a:cxnLst/>
-            <a:rect l="l" t="t" r="r" b="b"/>
-            <a:pathLst>
-              <a:path w="120000" h="120000" extrusionOk="0">
-                <a:moveTo>
-                  <a:pt x="0" y="0"/>
-                </a:moveTo>
-                <a:lnTo>
-                  <a:pt x="120000" y="0"/>
-                </a:lnTo>
-                <a:lnTo>
-                  <a:pt x="120000" y="120000"/>
-                </a:lnTo>
-                <a:lnTo>
-                  <a:pt x="0" y="120000"/>
-                </a:lnTo>
-                <a:close/>
-              </a:path>
-            </a:pathLst>
-          </a:custGeom>
-          <a:noFill/>
-          <a:ln w="9525" cap="flat" cmpd="sng">
-            <a:solidFill>
-              <a:srgbClr val="000000"/>
-            </a:solidFill>
-            <a:prstDash val="solid"/>
-            <a:round/>
-            <a:headEnd type="none" w="sm" len="sm"/>
-            <a:tailEnd type="none" w="sm" len="sm"/>
-          </a:ln>
-        </p:spPr>
-      </p:sp>
-      <p:sp>
-        <p:nvSpPr>
-          <p:cNvPr id="95" name="Google Shape;95;p8:notes"/>
-          <p:cNvSpPr txBox="1">
-            <a:spLocks noGrp="1"/>
-          </p:cNvSpPr>
-          <p:nvPr>
-            <p:ph type="body" idx="1"/>
-          </p:nvPr>
-        </p:nvSpPr>
-        <p:spPr>
-          <a:xfrm>
-            <a:off x="685800" y="4343400"/>
-            <a:ext cx="5486400" cy="4114800"/>
-          </a:xfrm>
-          <a:prstGeom prst="rect">
-            <a:avLst/>
-          </a:prstGeom>
-          <a:noFill/>
-          <a:ln>
-            <a:noFill/>
-          </a:ln>
-        </p:spPr>
-        <p:txBody>
-          <a:bodyPr spcFirstLastPara="1" wrap="square" lIns="91425" tIns="91425" rIns="91425" bIns="91425" anchor="t" anchorCtr="0">
-            <a:noAutofit/>
-          </a:bodyPr>
-          <a:lstStyle/>
-          <a:p>
-            <a:pPr marL="0" lvl="0" indent="0" algn="l" rtl="0">
-              <a:lnSpc>
-                <a:spcPct val="100000"/>
-              </a:lnSpc>
-              <a:spcBef>
-                <a:spcPts val="0"/>
-              </a:spcBef>
-              <a:spcAft>
-                <a:spcPts val="0"/>
-              </a:spcAft>
-              <a:buSzPts val="1100"/>
-              <a:buNone/>
-            </a:pPr>
-            <a:endParaRPr/>
-          </a:p>
-        </p:txBody>
-      </p:sp>
-    </p:spTree>
   </p:cSld>
   <p:clrMapOvr>
     <a:masterClrMapping/>
@@ -10814,6 +11398,154 @@
   <p:cSld>
     <p:spTree>
       <p:nvGrpSpPr>
+        <p:cNvPr id="1" name="Shape 96"/>
+        <p:cNvGrpSpPr/>
+        <p:nvPr/>
+      </p:nvGrpSpPr>
+      <p:grpSpPr>
+        <a:xfrm>
+          <a:off x="0" y="0"/>
+          <a:ext cx="0" cy="0"/>
+          <a:chOff x="0" y="0"/>
+          <a:chExt cx="0" cy="0"/>
+        </a:xfrm>
+      </p:grpSpPr>
+      <p:sp>
+        <p:nvSpPr>
+          <p:cNvPr id="97" name="Google Shape;97;p19"/>
+          <p:cNvSpPr txBox="1">
+            <a:spLocks noGrp="1"/>
+          </p:cNvSpPr>
+          <p:nvPr>
+            <p:ph type="title"/>
+          </p:nvPr>
+        </p:nvSpPr>
+        <p:spPr>
+          <a:xfrm>
+            <a:off x="0" y="0"/>
+            <a:ext cx="9144000" cy="543600"/>
+          </a:xfrm>
+          <a:prstGeom prst="rect">
+            <a:avLst/>
+          </a:prstGeom>
+          <a:solidFill>
+            <a:srgbClr val="1F4690"/>
+          </a:solidFill>
+          <a:ln>
+            <a:noFill/>
+          </a:ln>
+        </p:spPr>
+        <p:txBody>
+          <a:bodyPr spcFirstLastPara="1" wrap="square" lIns="91425" tIns="91425" rIns="91425" bIns="91425" anchor="ctr" anchorCtr="0">
+            <a:normAutofit/>
+          </a:bodyPr>
+          <a:lstStyle/>
+          <a:p>
+            <a:pPr marL="0" lvl="0" indent="0" algn="ctr" rtl="0">
+              <a:lnSpc>
+                <a:spcPct val="100000"/>
+              </a:lnSpc>
+              <a:spcBef>
+                <a:spcPts val="0"/>
+              </a:spcBef>
+              <a:spcAft>
+                <a:spcPts val="0"/>
+              </a:spcAft>
+              <a:buSzPts val="2200"/>
+              <a:buNone/>
+            </a:pPr>
+            <a:r>
+              <a:rPr lang="en-GB"/>
+              <a:t>{{Demand_drivers_h}}</a:t>
+            </a:r>
+            <a:endParaRPr/>
+          </a:p>
+        </p:txBody>
+      </p:sp>
+      <p:sp>
+        <p:nvSpPr>
+          <p:cNvPr id="2" name="TextBox 1">
+            <a:extLst>
+              <a:ext uri="{FF2B5EF4-FFF2-40B4-BE49-F238E27FC236}">
+                <a16:creationId xmlns:a16="http://schemas.microsoft.com/office/drawing/2014/main" id="{64CF6CF7-E7A3-3D6B-999B-5660E5E992F0}"/>
+              </a:ext>
+            </a:extLst>
+          </p:cNvPr>
+          <p:cNvSpPr txBox="1"/>
+          <p:nvPr/>
+        </p:nvSpPr>
+        <p:spPr>
+          <a:xfrm>
+            <a:off x="133350" y="789900"/>
+            <a:ext cx="8820150" cy="523220"/>
+          </a:xfrm>
+          <a:prstGeom prst="rect">
+            <a:avLst/>
+          </a:prstGeom>
+          <a:noFill/>
+        </p:spPr>
+        <p:txBody>
+          <a:bodyPr wrap="square" rtlCol="0">
+            <a:spAutoFit/>
+          </a:bodyPr>
+          <a:lstStyle/>
+          <a:p>
+            <a:r>
+              <a:rPr lang="en-GB" dirty="0">
+                <a:solidFill>
+                  <a:schemeClr val="dk1"/>
+                </a:solidFill>
+                <a:latin typeface="Calibri"/>
+                <a:ea typeface="Calibri"/>
+                <a:cs typeface="Calibri"/>
+                <a:sym typeface="Calibri"/>
+              </a:rPr>
+              <a:t>{{</a:t>
+            </a:r>
+            <a:r>
+              <a:rPr lang="en-GB" dirty="0" err="1">
+                <a:solidFill>
+                  <a:schemeClr val="dk1"/>
+                </a:solidFill>
+                <a:latin typeface="Calibri"/>
+                <a:ea typeface="Calibri"/>
+                <a:cs typeface="Calibri"/>
+                <a:sym typeface="Calibri"/>
+              </a:rPr>
+              <a:t>demand_drivers</a:t>
+            </a:r>
+            <a:r>
+              <a:rPr lang="en-GB" dirty="0">
+                <a:solidFill>
+                  <a:schemeClr val="dk1"/>
+                </a:solidFill>
+                <a:latin typeface="Calibri"/>
+                <a:ea typeface="Calibri"/>
+                <a:cs typeface="Calibri"/>
+                <a:sym typeface="Calibri"/>
+              </a:rPr>
+              <a:t>}}</a:t>
+            </a:r>
+            <a:endParaRPr lang="en-GB" dirty="0"/>
+          </a:p>
+          <a:p>
+            <a:endParaRPr lang="en-IN" dirty="0"/>
+          </a:p>
+        </p:txBody>
+      </p:sp>
+    </p:spTree>
+  </p:cSld>
+  <p:clrMapOvr>
+    <a:masterClrMapping/>
+  </p:clrMapOvr>
+</p:sld>
+</file>
+
+<file path=ppt/slides/slide11.xml><?xml version="1.0" encoding="utf-8"?>
+<p:sld xmlns:a="http://schemas.openxmlformats.org/drawingml/2006/main" xmlns:r="http://schemas.openxmlformats.org/officeDocument/2006/relationships" xmlns:p="http://schemas.openxmlformats.org/presentationml/2006/main">
+  <p:cSld>
+    <p:spTree>
+      <p:nvGrpSpPr>
         <p:cNvPr id="1" name="Shape 102"/>
         <p:cNvGrpSpPr/>
         <p:nvPr/>
@@ -10957,7 +11689,494 @@
 </p:sld>
 </file>
 
-<file path=ppt/slides/slide11.xml><?xml version="1.0" encoding="utf-8"?>
+<file path=ppt/slides/slide12.xml><?xml version="1.0" encoding="utf-8"?>
+<p:sld xmlns:a="http://schemas.openxmlformats.org/drawingml/2006/main" xmlns:r="http://schemas.openxmlformats.org/officeDocument/2006/relationships" xmlns:p="http://schemas.openxmlformats.org/presentationml/2006/main">
+  <p:cSld>
+    <p:spTree>
+      <p:nvGrpSpPr>
+        <p:cNvPr id="1" name="Shape 102">
+          <a:extLst>
+            <a:ext uri="{FF2B5EF4-FFF2-40B4-BE49-F238E27FC236}">
+              <a16:creationId xmlns:a16="http://schemas.microsoft.com/office/drawing/2014/main" id="{13F2821A-9B61-9BFF-17B1-D10D03BCE5CC}"/>
+            </a:ext>
+          </a:extLst>
+        </p:cNvPr>
+        <p:cNvGrpSpPr/>
+        <p:nvPr/>
+      </p:nvGrpSpPr>
+      <p:grpSpPr>
+        <a:xfrm>
+          <a:off x="0" y="0"/>
+          <a:ext cx="0" cy="0"/>
+          <a:chOff x="0" y="0"/>
+          <a:chExt cx="0" cy="0"/>
+        </a:xfrm>
+      </p:grpSpPr>
+      <p:sp>
+        <p:nvSpPr>
+          <p:cNvPr id="103" name="Google Shape;103;p20">
+            <a:extLst>
+              <a:ext uri="{FF2B5EF4-FFF2-40B4-BE49-F238E27FC236}">
+                <a16:creationId xmlns:a16="http://schemas.microsoft.com/office/drawing/2014/main" id="{20544458-F29C-DCE5-8A3C-9C57C2250B35}"/>
+              </a:ext>
+            </a:extLst>
+          </p:cNvPr>
+          <p:cNvSpPr txBox="1">
+            <a:spLocks noGrp="1"/>
+          </p:cNvSpPr>
+          <p:nvPr>
+            <p:ph type="title"/>
+          </p:nvPr>
+        </p:nvSpPr>
+        <p:spPr>
+          <a:xfrm>
+            <a:off x="0" y="0"/>
+            <a:ext cx="9144000" cy="543600"/>
+          </a:xfrm>
+          <a:prstGeom prst="rect">
+            <a:avLst/>
+          </a:prstGeom>
+          <a:solidFill>
+            <a:srgbClr val="1F4690"/>
+          </a:solidFill>
+          <a:ln>
+            <a:noFill/>
+          </a:ln>
+        </p:spPr>
+        <p:txBody>
+          <a:bodyPr spcFirstLastPara="1" wrap="square" lIns="91425" tIns="91425" rIns="91425" bIns="91425" anchor="ctr" anchorCtr="0">
+            <a:normAutofit/>
+          </a:bodyPr>
+          <a:lstStyle/>
+          <a:p>
+            <a:pPr marL="0" lvl="0" indent="0" algn="ctr" rtl="0">
+              <a:lnSpc>
+                <a:spcPct val="100000"/>
+              </a:lnSpc>
+              <a:spcBef>
+                <a:spcPts val="0"/>
+              </a:spcBef>
+              <a:spcAft>
+                <a:spcPts val="0"/>
+              </a:spcAft>
+              <a:buSzPts val="2200"/>
+              <a:buNone/>
+            </a:pPr>
+            <a:r>
+              <a:rPr lang="en-IN" dirty="0"/>
+              <a:t>{{Framework}}</a:t>
+            </a:r>
+            <a:endParaRPr dirty="0"/>
+          </a:p>
+        </p:txBody>
+      </p:sp>
+      <p:sp>
+        <p:nvSpPr>
+          <p:cNvPr id="2" name="TextBox 1">
+            <a:extLst>
+              <a:ext uri="{FF2B5EF4-FFF2-40B4-BE49-F238E27FC236}">
+                <a16:creationId xmlns:a16="http://schemas.microsoft.com/office/drawing/2014/main" id="{2E3E8C7E-04BC-7898-3AFE-F4B7EC631CB8}"/>
+              </a:ext>
+            </a:extLst>
+          </p:cNvPr>
+          <p:cNvSpPr txBox="1"/>
+          <p:nvPr/>
+        </p:nvSpPr>
+        <p:spPr>
+          <a:xfrm>
+            <a:off x="171450" y="723900"/>
+            <a:ext cx="8705850" cy="523220"/>
+          </a:xfrm>
+          <a:prstGeom prst="rect">
+            <a:avLst/>
+          </a:prstGeom>
+          <a:noFill/>
+        </p:spPr>
+        <p:txBody>
+          <a:bodyPr wrap="square" rtlCol="0">
+            <a:spAutoFit/>
+          </a:bodyPr>
+          <a:lstStyle/>
+          <a:p>
+            <a:r>
+              <a:rPr lang="en-GB" dirty="0">
+                <a:solidFill>
+                  <a:schemeClr val="dk1"/>
+                </a:solidFill>
+                <a:latin typeface="Calibri"/>
+                <a:ea typeface="Calibri"/>
+                <a:cs typeface="Calibri"/>
+                <a:sym typeface="Calibri"/>
+              </a:rPr>
+              <a:t>{{framework}}</a:t>
+            </a:r>
+            <a:endParaRPr lang="en-GB" dirty="0"/>
+          </a:p>
+          <a:p>
+            <a:endParaRPr lang="en-IN" dirty="0"/>
+          </a:p>
+        </p:txBody>
+      </p:sp>
+    </p:spTree>
+    <p:extLst>
+      <p:ext uri="{BB962C8B-B14F-4D97-AF65-F5344CB8AC3E}">
+        <p14:creationId xmlns:p14="http://schemas.microsoft.com/office/powerpoint/2010/main" val="2485628090"/>
+      </p:ext>
+    </p:extLst>
+  </p:cSld>
+  <p:clrMapOvr>
+    <a:masterClrMapping/>
+  </p:clrMapOvr>
+</p:sld>
+</file>
+
+<file path=ppt/slides/slide13.xml><?xml version="1.0" encoding="utf-8"?>
+<p:sld xmlns:a="http://schemas.openxmlformats.org/drawingml/2006/main" xmlns:r="http://schemas.openxmlformats.org/officeDocument/2006/relationships" xmlns:p="http://schemas.openxmlformats.org/presentationml/2006/main">
+  <p:cSld>
+    <p:spTree>
+      <p:nvGrpSpPr>
+        <p:cNvPr id="1" name="Shape 102">
+          <a:extLst>
+            <a:ext uri="{FF2B5EF4-FFF2-40B4-BE49-F238E27FC236}">
+              <a16:creationId xmlns:a16="http://schemas.microsoft.com/office/drawing/2014/main" id="{DA28D882-A088-3D94-C779-BFFEDE1A9EDE}"/>
+            </a:ext>
+          </a:extLst>
+        </p:cNvPr>
+        <p:cNvGrpSpPr/>
+        <p:nvPr/>
+      </p:nvGrpSpPr>
+      <p:grpSpPr>
+        <a:xfrm>
+          <a:off x="0" y="0"/>
+          <a:ext cx="0" cy="0"/>
+          <a:chOff x="0" y="0"/>
+          <a:chExt cx="0" cy="0"/>
+        </a:xfrm>
+      </p:grpSpPr>
+      <p:sp>
+        <p:nvSpPr>
+          <p:cNvPr id="103" name="Google Shape;103;p20">
+            <a:extLst>
+              <a:ext uri="{FF2B5EF4-FFF2-40B4-BE49-F238E27FC236}">
+                <a16:creationId xmlns:a16="http://schemas.microsoft.com/office/drawing/2014/main" id="{616D1863-200D-76EC-BAAE-413E19D6E682}"/>
+              </a:ext>
+            </a:extLst>
+          </p:cNvPr>
+          <p:cNvSpPr txBox="1">
+            <a:spLocks noGrp="1"/>
+          </p:cNvSpPr>
+          <p:nvPr>
+            <p:ph type="title"/>
+          </p:nvPr>
+        </p:nvSpPr>
+        <p:spPr>
+          <a:xfrm>
+            <a:off x="0" y="0"/>
+            <a:ext cx="9144000" cy="543600"/>
+          </a:xfrm>
+          <a:prstGeom prst="rect">
+            <a:avLst/>
+          </a:prstGeom>
+          <a:solidFill>
+            <a:srgbClr val="1F4690"/>
+          </a:solidFill>
+          <a:ln>
+            <a:noFill/>
+          </a:ln>
+        </p:spPr>
+        <p:txBody>
+          <a:bodyPr spcFirstLastPara="1" wrap="square" lIns="91425" tIns="91425" rIns="91425" bIns="91425" anchor="ctr" anchorCtr="0">
+            <a:normAutofit/>
+          </a:bodyPr>
+          <a:lstStyle/>
+          <a:p>
+            <a:pPr marL="0" lvl="0" indent="0" algn="ctr" rtl="0">
+              <a:lnSpc>
+                <a:spcPct val="100000"/>
+              </a:lnSpc>
+              <a:spcBef>
+                <a:spcPts val="0"/>
+              </a:spcBef>
+              <a:spcAft>
+                <a:spcPts val="0"/>
+              </a:spcAft>
+              <a:buSzPts val="2200"/>
+              <a:buNone/>
+            </a:pPr>
+            <a:r>
+              <a:rPr lang="en-GB" dirty="0"/>
+              <a:t>{{</a:t>
+            </a:r>
+            <a:r>
+              <a:rPr lang="en-GB" dirty="0" err="1"/>
+              <a:t>Entry_Review_Exit_h</a:t>
+            </a:r>
+            <a:r>
+              <a:rPr lang="en-GB" dirty="0"/>
+              <a:t>}}</a:t>
+            </a:r>
+            <a:endParaRPr dirty="0"/>
+          </a:p>
+        </p:txBody>
+      </p:sp>
+      <p:sp>
+        <p:nvSpPr>
+          <p:cNvPr id="2" name="TextBox 1">
+            <a:extLst>
+              <a:ext uri="{FF2B5EF4-FFF2-40B4-BE49-F238E27FC236}">
+                <a16:creationId xmlns:a16="http://schemas.microsoft.com/office/drawing/2014/main" id="{A954FD08-EA8C-9777-9B1C-48D3FB78B146}"/>
+              </a:ext>
+            </a:extLst>
+          </p:cNvPr>
+          <p:cNvSpPr txBox="1"/>
+          <p:nvPr/>
+        </p:nvSpPr>
+        <p:spPr>
+          <a:xfrm>
+            <a:off x="171450" y="723900"/>
+            <a:ext cx="8705850" cy="523220"/>
+          </a:xfrm>
+          <a:prstGeom prst="rect">
+            <a:avLst/>
+          </a:prstGeom>
+          <a:noFill/>
+        </p:spPr>
+        <p:txBody>
+          <a:bodyPr wrap="square" rtlCol="0">
+            <a:spAutoFit/>
+          </a:bodyPr>
+          <a:lstStyle/>
+          <a:p>
+            <a:r>
+              <a:rPr lang="en-GB" dirty="0">
+                <a:solidFill>
+                  <a:schemeClr val="dk1"/>
+                </a:solidFill>
+                <a:latin typeface="Calibri"/>
+                <a:ea typeface="Calibri"/>
+                <a:cs typeface="Calibri"/>
+                <a:sym typeface="Calibri"/>
+              </a:rPr>
+              <a:t>{{</a:t>
+            </a:r>
+            <a:r>
+              <a:rPr lang="en-GB" dirty="0" err="1">
+                <a:solidFill>
+                  <a:schemeClr val="dk1"/>
+                </a:solidFill>
+                <a:latin typeface="Calibri"/>
+                <a:ea typeface="Calibri"/>
+                <a:cs typeface="Calibri"/>
+                <a:sym typeface="Calibri"/>
+              </a:rPr>
+              <a:t>Entry_Review_Exit</a:t>
+            </a:r>
+            <a:r>
+              <a:rPr lang="en-GB" dirty="0">
+                <a:solidFill>
+                  <a:schemeClr val="dk1"/>
+                </a:solidFill>
+                <a:latin typeface="Calibri"/>
+                <a:ea typeface="Calibri"/>
+                <a:cs typeface="Calibri"/>
+                <a:sym typeface="Calibri"/>
+              </a:rPr>
+              <a:t>}}</a:t>
+            </a:r>
+            <a:endParaRPr lang="en-GB" dirty="0"/>
+          </a:p>
+          <a:p>
+            <a:endParaRPr lang="en-IN" dirty="0"/>
+          </a:p>
+        </p:txBody>
+      </p:sp>
+    </p:spTree>
+    <p:extLst>
+      <p:ext uri="{BB962C8B-B14F-4D97-AF65-F5344CB8AC3E}">
+        <p14:creationId xmlns:p14="http://schemas.microsoft.com/office/powerpoint/2010/main" val="2618297353"/>
+      </p:ext>
+    </p:extLst>
+  </p:cSld>
+  <p:clrMapOvr>
+    <a:masterClrMapping/>
+  </p:clrMapOvr>
+</p:sld>
+</file>
+
+<file path=ppt/slides/slide14.xml><?xml version="1.0" encoding="utf-8"?>
+<p:sld xmlns:a="http://schemas.openxmlformats.org/drawingml/2006/main" xmlns:r="http://schemas.openxmlformats.org/officeDocument/2006/relationships" xmlns:p="http://schemas.openxmlformats.org/presentationml/2006/main">
+  <p:cSld>
+    <p:spTree>
+      <p:nvGrpSpPr>
+        <p:cNvPr id="1" name="Shape 102">
+          <a:extLst>
+            <a:ext uri="{FF2B5EF4-FFF2-40B4-BE49-F238E27FC236}">
+              <a16:creationId xmlns:a16="http://schemas.microsoft.com/office/drawing/2014/main" id="{D80AF3DB-5E8E-8887-C1E3-C58A4AC1719F}"/>
+            </a:ext>
+          </a:extLst>
+        </p:cNvPr>
+        <p:cNvGrpSpPr/>
+        <p:nvPr/>
+      </p:nvGrpSpPr>
+      <p:grpSpPr>
+        <a:xfrm>
+          <a:off x="0" y="0"/>
+          <a:ext cx="0" cy="0"/>
+          <a:chOff x="0" y="0"/>
+          <a:chExt cx="0" cy="0"/>
+        </a:xfrm>
+      </p:grpSpPr>
+      <p:sp>
+        <p:nvSpPr>
+          <p:cNvPr id="103" name="Google Shape;103;p20">
+            <a:extLst>
+              <a:ext uri="{FF2B5EF4-FFF2-40B4-BE49-F238E27FC236}">
+                <a16:creationId xmlns:a16="http://schemas.microsoft.com/office/drawing/2014/main" id="{9353EBF1-79BF-A691-E193-094287881F8B}"/>
+              </a:ext>
+            </a:extLst>
+          </p:cNvPr>
+          <p:cNvSpPr txBox="1">
+            <a:spLocks noGrp="1"/>
+          </p:cNvSpPr>
+          <p:nvPr>
+            <p:ph type="title"/>
+          </p:nvPr>
+        </p:nvSpPr>
+        <p:spPr>
+          <a:xfrm>
+            <a:off x="0" y="0"/>
+            <a:ext cx="9144000" cy="543600"/>
+          </a:xfrm>
+          <a:prstGeom prst="rect">
+            <a:avLst/>
+          </a:prstGeom>
+          <a:solidFill>
+            <a:srgbClr val="1F4690"/>
+          </a:solidFill>
+          <a:ln>
+            <a:noFill/>
+          </a:ln>
+        </p:spPr>
+        <p:txBody>
+          <a:bodyPr spcFirstLastPara="1" wrap="square" lIns="91425" tIns="91425" rIns="91425" bIns="91425" anchor="ctr" anchorCtr="0">
+            <a:normAutofit/>
+          </a:bodyPr>
+          <a:lstStyle/>
+          <a:p>
+            <a:pPr marL="0" lvl="0" indent="0" algn="ctr" rtl="0">
+              <a:lnSpc>
+                <a:spcPct val="100000"/>
+              </a:lnSpc>
+              <a:spcBef>
+                <a:spcPts val="0"/>
+              </a:spcBef>
+              <a:spcAft>
+                <a:spcPts val="0"/>
+              </a:spcAft>
+              <a:buSzPts val="2200"/>
+              <a:buNone/>
+            </a:pPr>
+            <a:r>
+              <a:rPr lang="en-GB" dirty="0"/>
+              <a:t>{{</a:t>
+            </a:r>
+            <a:r>
+              <a:rPr lang="en-GB" dirty="0" err="1"/>
+              <a:t>Scenario_Analysis_h</a:t>
+            </a:r>
+            <a:r>
+              <a:rPr lang="en-GB" dirty="0"/>
+              <a:t>}}</a:t>
+            </a:r>
+            <a:endParaRPr dirty="0"/>
+          </a:p>
+        </p:txBody>
+      </p:sp>
+      <p:sp>
+        <p:nvSpPr>
+          <p:cNvPr id="2" name="TextBox 1">
+            <a:extLst>
+              <a:ext uri="{FF2B5EF4-FFF2-40B4-BE49-F238E27FC236}">
+                <a16:creationId xmlns:a16="http://schemas.microsoft.com/office/drawing/2014/main" id="{0768383D-DDEA-F280-8DDA-D5F56D4AB855}"/>
+              </a:ext>
+            </a:extLst>
+          </p:cNvPr>
+          <p:cNvSpPr txBox="1"/>
+          <p:nvPr/>
+        </p:nvSpPr>
+        <p:spPr>
+          <a:xfrm>
+            <a:off x="171450" y="723900"/>
+            <a:ext cx="8705850" cy="523220"/>
+          </a:xfrm>
+          <a:prstGeom prst="rect">
+            <a:avLst/>
+          </a:prstGeom>
+          <a:noFill/>
+        </p:spPr>
+        <p:txBody>
+          <a:bodyPr wrap="square" rtlCol="0">
+            <a:spAutoFit/>
+          </a:bodyPr>
+          <a:lstStyle/>
+          <a:p>
+            <a:r>
+              <a:rPr lang="en-GB" dirty="0">
+                <a:solidFill>
+                  <a:schemeClr val="dk1"/>
+                </a:solidFill>
+                <a:latin typeface="Calibri"/>
+                <a:ea typeface="Calibri"/>
+                <a:cs typeface="Calibri"/>
+                <a:sym typeface="Calibri"/>
+              </a:rPr>
+              <a:t>{{</a:t>
+            </a:r>
+            <a:r>
+              <a:rPr lang="en-GB" dirty="0" err="1">
+                <a:solidFill>
+                  <a:schemeClr val="dk1"/>
+                </a:solidFill>
+                <a:latin typeface="Calibri"/>
+                <a:ea typeface="Calibri"/>
+                <a:cs typeface="Calibri"/>
+                <a:sym typeface="Calibri"/>
+              </a:rPr>
+              <a:t>Scenario_Analysis</a:t>
+            </a:r>
+            <a:r>
+              <a:rPr lang="en-GB" dirty="0">
+                <a:solidFill>
+                  <a:schemeClr val="dk1"/>
+                </a:solidFill>
+                <a:latin typeface="Calibri"/>
+                <a:ea typeface="Calibri"/>
+                <a:cs typeface="Calibri"/>
+                <a:sym typeface="Calibri"/>
+              </a:rPr>
+              <a:t>}}</a:t>
+            </a:r>
+            <a:endParaRPr lang="en-GB" dirty="0"/>
+          </a:p>
+          <a:p>
+            <a:endParaRPr lang="en-IN" dirty="0"/>
+          </a:p>
+        </p:txBody>
+      </p:sp>
+    </p:spTree>
+    <p:extLst>
+      <p:ext uri="{BB962C8B-B14F-4D97-AF65-F5344CB8AC3E}">
+        <p14:creationId xmlns:p14="http://schemas.microsoft.com/office/powerpoint/2010/main" val="151874871"/>
+      </p:ext>
+    </p:extLst>
+  </p:cSld>
+  <p:clrMapOvr>
+    <a:masterClrMapping/>
+  </p:clrMapOvr>
+</p:sld>
+</file>
+
+<file path=ppt/slides/slide15.xml><?xml version="1.0" encoding="utf-8"?>
 <p:sld xmlns:a="http://schemas.openxmlformats.org/drawingml/2006/main" xmlns:r="http://schemas.openxmlformats.org/officeDocument/2006/relationships" xmlns:p="http://schemas.openxmlformats.org/presentationml/2006/main">
   <p:cSld>
     <p:spTree>
@@ -11323,7 +12542,7 @@
 </p:sld>
 </file>
 
-<file path=ppt/slides/slide12.xml><?xml version="1.0" encoding="utf-8"?>
+<file path=ppt/slides/slide16.xml><?xml version="1.0" encoding="utf-8"?>
 <p:sld xmlns:a="http://schemas.openxmlformats.org/drawingml/2006/main" xmlns:r="http://schemas.openxmlformats.org/officeDocument/2006/relationships" xmlns:p="http://schemas.openxmlformats.org/presentationml/2006/main">
   <p:cSld>
     <p:spTree>
@@ -11461,7 +12680,7 @@
 </p:sld>
 </file>
 
-<file path=ppt/slides/slide13.xml><?xml version="1.0" encoding="utf-8"?>
+<file path=ppt/slides/slide17.xml><?xml version="1.0" encoding="utf-8"?>
 <p:sld xmlns:a="http://schemas.openxmlformats.org/drawingml/2006/main" xmlns:r="http://schemas.openxmlformats.org/officeDocument/2006/relationships" xmlns:p="http://schemas.openxmlformats.org/presentationml/2006/main">
   <p:cSld>
     <p:spTree>
@@ -13110,6 +14329,179 @@
   <p:cSld>
     <p:spTree>
       <p:nvGrpSpPr>
+        <p:cNvPr id="1" name="Shape 78">
+          <a:extLst>
+            <a:ext uri="{FF2B5EF4-FFF2-40B4-BE49-F238E27FC236}">
+              <a16:creationId xmlns:a16="http://schemas.microsoft.com/office/drawing/2014/main" id="{B1BA2F5A-3EBB-3894-0C1F-C505C4DE984B}"/>
+            </a:ext>
+          </a:extLst>
+        </p:cNvPr>
+        <p:cNvGrpSpPr/>
+        <p:nvPr/>
+      </p:nvGrpSpPr>
+      <p:grpSpPr>
+        <a:xfrm>
+          <a:off x="0" y="0"/>
+          <a:ext cx="0" cy="0"/>
+          <a:chOff x="0" y="0"/>
+          <a:chExt cx="0" cy="0"/>
+        </a:xfrm>
+      </p:grpSpPr>
+      <p:sp>
+        <p:nvSpPr>
+          <p:cNvPr id="79" name="Google Shape;79;p16">
+            <a:extLst>
+              <a:ext uri="{FF2B5EF4-FFF2-40B4-BE49-F238E27FC236}">
+                <a16:creationId xmlns:a16="http://schemas.microsoft.com/office/drawing/2014/main" id="{4B8B3A01-BCA6-1BCF-B5AE-3EC644609E89}"/>
+              </a:ext>
+            </a:extLst>
+          </p:cNvPr>
+          <p:cNvSpPr txBox="1">
+            <a:spLocks noGrp="1"/>
+          </p:cNvSpPr>
+          <p:nvPr>
+            <p:ph type="title"/>
+          </p:nvPr>
+        </p:nvSpPr>
+        <p:spPr>
+          <a:xfrm>
+            <a:off x="0" y="0"/>
+            <a:ext cx="9144000" cy="543600"/>
+          </a:xfrm>
+          <a:prstGeom prst="rect">
+            <a:avLst/>
+          </a:prstGeom>
+          <a:solidFill>
+            <a:srgbClr val="1F4690"/>
+          </a:solidFill>
+          <a:ln>
+            <a:noFill/>
+          </a:ln>
+        </p:spPr>
+        <p:txBody>
+          <a:bodyPr spcFirstLastPara="1" wrap="square" lIns="91425" tIns="91425" rIns="91425" bIns="91425" anchor="ctr" anchorCtr="0">
+            <a:normAutofit/>
+          </a:bodyPr>
+          <a:lstStyle/>
+          <a:p>
+            <a:pPr marL="0" lvl="0" indent="0" algn="ctr" rtl="0">
+              <a:lnSpc>
+                <a:spcPct val="100000"/>
+              </a:lnSpc>
+              <a:spcBef>
+                <a:spcPts val="0"/>
+              </a:spcBef>
+              <a:spcAft>
+                <a:spcPts val="0"/>
+              </a:spcAft>
+              <a:buSzPts val="2200"/>
+              <a:buNone/>
+            </a:pPr>
+            <a:r>
+              <a:rPr lang="en-GB" dirty="0"/>
+              <a:t>{{</a:t>
+            </a:r>
+            <a:r>
+              <a:rPr lang="en-GB" dirty="0" err="1"/>
+              <a:t>Coporate_Governance_h</a:t>
+            </a:r>
+            <a:r>
+              <a:rPr lang="en-GB" dirty="0"/>
+              <a:t>}}</a:t>
+            </a:r>
+            <a:endParaRPr dirty="0"/>
+          </a:p>
+        </p:txBody>
+      </p:sp>
+      <p:sp>
+        <p:nvSpPr>
+          <p:cNvPr id="3" name="TextBox 2">
+            <a:extLst>
+              <a:ext uri="{FF2B5EF4-FFF2-40B4-BE49-F238E27FC236}">
+                <a16:creationId xmlns:a16="http://schemas.microsoft.com/office/drawing/2014/main" id="{145DCD46-25F6-0EFB-AFF7-994761E62654}"/>
+              </a:ext>
+            </a:extLst>
+          </p:cNvPr>
+          <p:cNvSpPr txBox="1"/>
+          <p:nvPr/>
+        </p:nvSpPr>
+        <p:spPr>
+          <a:xfrm>
+            <a:off x="138289" y="804574"/>
+            <a:ext cx="8867422" cy="523220"/>
+          </a:xfrm>
+          <a:prstGeom prst="rect">
+            <a:avLst/>
+          </a:prstGeom>
+          <a:noFill/>
+        </p:spPr>
+        <p:txBody>
+          <a:bodyPr wrap="square" rtlCol="0">
+            <a:spAutoFit/>
+          </a:bodyPr>
+          <a:lstStyle/>
+          <a:p>
+            <a:r>
+              <a:rPr lang="en-GB" dirty="0">
+                <a:solidFill>
+                  <a:schemeClr val="dk1"/>
+                </a:solidFill>
+                <a:latin typeface="Calibri"/>
+                <a:ea typeface="Calibri"/>
+                <a:cs typeface="Calibri"/>
+                <a:sym typeface="Calibri"/>
+              </a:rPr>
+              <a:t>{{</a:t>
+            </a:r>
+            <a:r>
+              <a:rPr lang="en-GB" dirty="0" err="1">
+                <a:solidFill>
+                  <a:schemeClr val="dk1"/>
+                </a:solidFill>
+                <a:latin typeface="Calibri"/>
+                <a:ea typeface="Calibri"/>
+                <a:cs typeface="Calibri"/>
+                <a:sym typeface="Calibri"/>
+              </a:rPr>
+              <a:t>Coporate_Governance</a:t>
+            </a:r>
+            <a:r>
+              <a:rPr lang="en-GB" dirty="0">
+                <a:solidFill>
+                  <a:schemeClr val="dk1"/>
+                </a:solidFill>
+                <a:latin typeface="Calibri"/>
+                <a:ea typeface="Calibri"/>
+                <a:cs typeface="Calibri"/>
+                <a:sym typeface="Calibri"/>
+              </a:rPr>
+              <a:t>}}</a:t>
+            </a:r>
+            <a:endParaRPr lang="en-GB" dirty="0"/>
+          </a:p>
+          <a:p>
+            <a:endParaRPr lang="en-IN" dirty="0"/>
+          </a:p>
+        </p:txBody>
+      </p:sp>
+    </p:spTree>
+    <p:extLst>
+      <p:ext uri="{BB962C8B-B14F-4D97-AF65-F5344CB8AC3E}">
+        <p14:creationId xmlns:p14="http://schemas.microsoft.com/office/powerpoint/2010/main" val="9698989"/>
+      </p:ext>
+    </p:extLst>
+  </p:cSld>
+  <p:clrMapOvr>
+    <a:masterClrMapping/>
+  </p:clrMapOvr>
+</p:sld>
+</file>
+
+<file path=ppt/slides/slide7.xml><?xml version="1.0" encoding="utf-8"?>
+<p:sld xmlns:a="http://schemas.openxmlformats.org/drawingml/2006/main" xmlns:r="http://schemas.openxmlformats.org/officeDocument/2006/relationships" xmlns:p="http://schemas.openxmlformats.org/presentationml/2006/main">
+  <p:cSld>
+    <p:spTree>
+      <p:nvGrpSpPr>
         <p:cNvPr id="1" name="Shape 84"/>
         <p:cNvGrpSpPr/>
         <p:nvPr/>
@@ -13253,7 +14645,7 @@
 </p:sld>
 </file>
 
-<file path=ppt/slides/slide7.xml><?xml version="1.0" encoding="utf-8"?>
+<file path=ppt/slides/slide8.xml><?xml version="1.0" encoding="utf-8"?>
 <p:sld xmlns:a="http://schemas.openxmlformats.org/drawingml/2006/main" xmlns:r="http://schemas.openxmlformats.org/officeDocument/2006/relationships" xmlns:p="http://schemas.openxmlformats.org/presentationml/2006/main">
   <p:cSld>
     <p:spTree>
@@ -13418,7 +14810,7 @@
 </p:sld>
 </file>
 
-<file path=ppt/slides/slide8.xml><?xml version="1.0" encoding="utf-8"?>
+<file path=ppt/slides/slide9.xml><?xml version="1.0" encoding="utf-8"?>
 <p:sld xmlns:a="http://schemas.openxmlformats.org/drawingml/2006/main" xmlns:r="http://schemas.openxmlformats.org/officeDocument/2006/relationships" xmlns:p="http://schemas.openxmlformats.org/presentationml/2006/main">
   <p:cSld>
     <p:spTree>
@@ -13548,154 +14940,6 @@
         <p14:creationId xmlns:p14="http://schemas.microsoft.com/office/powerpoint/2010/main" val="2521314153"/>
       </p:ext>
     </p:extLst>
-  </p:cSld>
-  <p:clrMapOvr>
-    <a:masterClrMapping/>
-  </p:clrMapOvr>
-</p:sld>
-</file>
-
-<file path=ppt/slides/slide9.xml><?xml version="1.0" encoding="utf-8"?>
-<p:sld xmlns:a="http://schemas.openxmlformats.org/drawingml/2006/main" xmlns:r="http://schemas.openxmlformats.org/officeDocument/2006/relationships" xmlns:p="http://schemas.openxmlformats.org/presentationml/2006/main">
-  <p:cSld>
-    <p:spTree>
-      <p:nvGrpSpPr>
-        <p:cNvPr id="1" name="Shape 96"/>
-        <p:cNvGrpSpPr/>
-        <p:nvPr/>
-      </p:nvGrpSpPr>
-      <p:grpSpPr>
-        <a:xfrm>
-          <a:off x="0" y="0"/>
-          <a:ext cx="0" cy="0"/>
-          <a:chOff x="0" y="0"/>
-          <a:chExt cx="0" cy="0"/>
-        </a:xfrm>
-      </p:grpSpPr>
-      <p:sp>
-        <p:nvSpPr>
-          <p:cNvPr id="97" name="Google Shape;97;p19"/>
-          <p:cNvSpPr txBox="1">
-            <a:spLocks noGrp="1"/>
-          </p:cNvSpPr>
-          <p:nvPr>
-            <p:ph type="title"/>
-          </p:nvPr>
-        </p:nvSpPr>
-        <p:spPr>
-          <a:xfrm>
-            <a:off x="0" y="0"/>
-            <a:ext cx="9144000" cy="543600"/>
-          </a:xfrm>
-          <a:prstGeom prst="rect">
-            <a:avLst/>
-          </a:prstGeom>
-          <a:solidFill>
-            <a:srgbClr val="1F4690"/>
-          </a:solidFill>
-          <a:ln>
-            <a:noFill/>
-          </a:ln>
-        </p:spPr>
-        <p:txBody>
-          <a:bodyPr spcFirstLastPara="1" wrap="square" lIns="91425" tIns="91425" rIns="91425" bIns="91425" anchor="ctr" anchorCtr="0">
-            <a:normAutofit/>
-          </a:bodyPr>
-          <a:lstStyle/>
-          <a:p>
-            <a:pPr marL="0" lvl="0" indent="0" algn="ctr" rtl="0">
-              <a:lnSpc>
-                <a:spcPct val="100000"/>
-              </a:lnSpc>
-              <a:spcBef>
-                <a:spcPts val="0"/>
-              </a:spcBef>
-              <a:spcAft>
-                <a:spcPts val="0"/>
-              </a:spcAft>
-              <a:buSzPts val="2200"/>
-              <a:buNone/>
-            </a:pPr>
-            <a:r>
-              <a:rPr lang="en-GB"/>
-              <a:t>{{Demand_drivers_h}}</a:t>
-            </a:r>
-            <a:endParaRPr/>
-          </a:p>
-        </p:txBody>
-      </p:sp>
-      <p:sp>
-        <p:nvSpPr>
-          <p:cNvPr id="2" name="TextBox 1">
-            <a:extLst>
-              <a:ext uri="{FF2B5EF4-FFF2-40B4-BE49-F238E27FC236}">
-                <a16:creationId xmlns:a16="http://schemas.microsoft.com/office/drawing/2014/main" id="{64CF6CF7-E7A3-3D6B-999B-5660E5E992F0}"/>
-              </a:ext>
-            </a:extLst>
-          </p:cNvPr>
-          <p:cNvSpPr txBox="1"/>
-          <p:nvPr/>
-        </p:nvSpPr>
-        <p:spPr>
-          <a:xfrm>
-            <a:off x="133350" y="789900"/>
-            <a:ext cx="8820150" cy="523220"/>
-          </a:xfrm>
-          <a:prstGeom prst="rect">
-            <a:avLst/>
-          </a:prstGeom>
-          <a:noFill/>
-        </p:spPr>
-        <p:txBody>
-          <a:bodyPr wrap="square" rtlCol="0">
-            <a:spAutoFit/>
-          </a:bodyPr>
-          <a:lstStyle/>
-          <a:p>
-            <a:r>
-              <a:rPr lang="en-GB" dirty="0">
-                <a:solidFill>
-                  <a:schemeClr val="dk1"/>
-                </a:solidFill>
-                <a:latin typeface="Calibri"/>
-                <a:ea typeface="Calibri"/>
-                <a:cs typeface="Calibri"/>
-                <a:sym typeface="Calibri"/>
-              </a:rPr>
-              <a:t>{{</a:t>
-            </a:r>
-            <a:r>
-              <a:rPr lang="en-GB" dirty="0" err="1">
-                <a:solidFill>
-                  <a:schemeClr val="dk1"/>
-                </a:solidFill>
-                <a:latin typeface="Calibri"/>
-                <a:ea typeface="Calibri"/>
-                <a:cs typeface="Calibri"/>
-                <a:sym typeface="Calibri"/>
-              </a:rPr>
-              <a:t>demand_drivers</a:t>
-            </a:r>
-            <a:r>
-              <a:rPr lang="en-GB" dirty="0">
-                <a:solidFill>
-                  <a:schemeClr val="dk1"/>
-                </a:solidFill>
-                <a:latin typeface="Calibri"/>
-                <a:ea typeface="Calibri"/>
-                <a:cs typeface="Calibri"/>
-                <a:sym typeface="Calibri"/>
-              </a:rPr>
-              <a:t>}}</a:t>
-            </a:r>
-            <a:endParaRPr lang="en-GB" dirty="0"/>
-          </a:p>
-          <a:p>
-            <a:endParaRPr lang="en-IN" dirty="0"/>
-          </a:p>
-        </p:txBody>
-      </p:sp>
-    </p:spTree>
   </p:cSld>
   <p:clrMapOvr>
     <a:masterClrMapping/>
